--- a/materials/初心者向けLT-E2Eテスト自動化/slides.pptx
+++ b/materials/初心者向けLT-E2Eテスト自動化/slides.pptx
@@ -950,7 +950,7 @@
           <a:p>
             <a:r>
               <a:rPr lang="en-US" dirty="0"/>
-              <a:t>[2:20-3:20] 本題のメイン。セレクタ不安定でテストが落ちまくったエピソードを具体的に。ここが一番厚めに話すパート。</a:t>
+              <a:t>[2:20-3:20] 本題のメイン。XPath→テキストベースに変えても、状態依存の表示切り替えとuseEffectの多重発火でテストが落ちる話。体感失敗率2割。ここが一番厚めに話すパート。</a:t>
             </a:r>
             <a:endParaRPr lang="en-US" dirty="0"/>
           </a:p>
@@ -1038,7 +1038,7 @@
           <a:p>
             <a:r>
               <a:rPr lang="en-US" dirty="0"/>
-              <a:t>[3:20-4:00] 正直な現状。完全には解決していないこと、落ちたケースは再実行/手動確認で品質担保していることを話す。</a:t>
+              <a:t>[3:20-4:00] 正直な現状。ログ・エラーを見て分からなければ再実行、それでもダメなら手動確認、という流れ。開発環境に自信がなくプロジェクト外からコマンド実行にしている話も。</a:t>
             </a:r>
             <a:endParaRPr lang="en-US" dirty="0"/>
           </a:p>
@@ -1126,7 +1126,7 @@
           <a:p>
             <a:r>
               <a:rPr lang="en-US" dirty="0"/>
-              <a:t>[4:00-4:40] 気づき。自動化の良さと難しさを両方フラットに話す。</a:t>
+              <a:t>[4:00-4:40] 気づき。良かったこと:回帰確認が23時→19時に短縮した実体験を話す。大変だったこと:状態依存UIのセレクタとメンテコスト。</a:t>
             </a:r>
             <a:endParaRPr lang="en-US" dirty="0"/>
           </a:p>
@@ -3811,7 +3811,7 @@
         <p:spPr>
           <a:xfrm>
             <a:off x="548640" y="2651760"/>
-            <a:ext cx="6400800" cy="2377440"/>
+            <a:ext cx="6400800" cy="2743200"/>
           </a:xfrm>
           <a:prstGeom prst="rect">
             <a:avLst/>
@@ -3839,7 +3839,7 @@
                 <a:ea typeface="Calibri" pitchFamily="34" charset="-122"/>
                 <a:cs typeface="Calibri" pitchFamily="34" charset="-120"/>
               </a:rPr>
-              <a:t>セレクタ(画面の要素を指定する仕組み)が不安定</a:t>
+              <a:t>最初はXPathを使用 → DOM構造が変わって崩れる</a:t>
             </a:r>
             <a:endParaRPr lang="en-US" sz="1600" dirty="0"/>
           </a:p>
@@ -3860,7 +3860,7 @@
                 <a:ea typeface="Calibri" pitchFamily="34" charset="-122"/>
                 <a:cs typeface="Calibri" pitchFamily="34" charset="-120"/>
               </a:rPr>
-              <a:t>同じテストなのに、成功したり失敗したりする</a:t>
+              <a:t>テキストベースに変えても、状態で表示/非表示が切り替わるUIで失敗</a:t>
             </a:r>
             <a:endParaRPr lang="en-US" sz="1600" dirty="0"/>
           </a:p>
@@ -3881,7 +3881,7 @@
                 <a:ea typeface="Calibri" pitchFamily="34" charset="-122"/>
                 <a:cs typeface="Calibri" pitchFamily="34" charset="-120"/>
               </a:rPr>
-              <a:t>CIの失敗通知が鳴りまくる…</a:t>
+              <a:t>原因はuseEffectの多重発火。アプリの再描画自体が不安定だった</a:t>
             </a:r>
             <a:endParaRPr lang="en-US" sz="1600" dirty="0"/>
           </a:p>
@@ -3889,7 +3889,46 @@
       </p:sp>
       <p:sp>
         <p:nvSpPr>
-          <p:cNvPr id="5" name="Shape 3"/>
+          <p:cNvPr id="5" name="Text 3"/>
+          <p:cNvSpPr txBox="1"/>
+          <p:nvPr/>
+        </p:nvSpPr>
+        <p:spPr>
+          <a:xfrm>
+            <a:off x="548640" y="5669280"/>
+            <a:ext cx="10881360" cy="548640"/>
+          </a:xfrm>
+          <a:prstGeom prst="rect">
+            <a:avLst/>
+          </a:prstGeom>
+          <a:noFill/>
+          <a:ln/>
+        </p:spPr>
+        <p:txBody>
+          <a:bodyPr wrap="square" lIns="0" tIns="0" rIns="0" bIns="0" rtlCol="0" anchor="ctr"/>
+          <a:lstStyle/>
+          <a:p>
+            <a:pPr algn="ctr" indent="0" marL="0">
+              <a:buNone/>
+            </a:pPr>
+            <a:r>
+              <a:rPr lang="en-US" sz="1600" b="1" i="1" dirty="0">
+                <a:solidFill>
+                  <a:srgbClr val="E63946"/>
+                </a:solidFill>
+                <a:latin typeface="Calibri" pitchFamily="34" charset="0"/>
+                <a:ea typeface="Calibri" pitchFamily="34" charset="-122"/>
+                <a:cs typeface="Calibri" pitchFamily="34" charset="-120"/>
+              </a:rPr>
+              <a:t>「テストが不安定」なんじゃなく、「アプリ」が不安定だった…!</a:t>
+            </a:r>
+            <a:endParaRPr lang="en-US" sz="1600" dirty="0"/>
+          </a:p>
+        </p:txBody>
+      </p:sp>
+      <p:sp>
+        <p:nvSpPr>
+          <p:cNvPr id="6" name="Shape 4"/>
           <p:cNvSpPr/>
           <p:nvPr/>
         </p:nvSpPr>
@@ -3918,13 +3957,13 @@
       </p:sp>
       <p:sp>
         <p:nvSpPr>
-          <p:cNvPr id="6" name="Text 4"/>
-          <p:cNvSpPr txBox="1"/>
-          <p:nvPr/>
-        </p:nvSpPr>
-        <p:spPr>
-          <a:xfrm>
-            <a:off x="7315200" y="1600200"/>
+          <p:cNvPr id="7" name="Text 5"/>
+          <p:cNvSpPr txBox="1"/>
+          <p:nvPr/>
+        </p:nvSpPr>
+        <p:spPr>
+          <a:xfrm>
+            <a:off x="7315200" y="1737360"/>
             <a:ext cx="4297680" cy="365760"/>
           </a:xfrm>
           <a:prstGeom prst="rect">
@@ -3941,7 +3980,7 @@
               <a:buNone/>
             </a:pPr>
             <a:r>
-              <a:rPr lang="en-US" sz="1300" b="1" dirty="0">
+              <a:rPr lang="en-US" sz="1400" b="1" dirty="0">
                 <a:solidFill>
                   <a:srgbClr val="E63946"/>
                 </a:solidFill>
@@ -3949,22 +3988,218 @@
                 <a:ea typeface="Calibri" pitchFamily="34" charset="-122"/>
                 <a:cs typeface="Calibri" pitchFamily="34" charset="-120"/>
               </a:rPr>
-              <a:t>同じテストを9回実行</a:t>
-            </a:r>
-            <a:endParaRPr lang="en-US" sz="1300" dirty="0"/>
-          </a:p>
-        </p:txBody>
-      </p:sp>
-      <p:sp>
-        <p:nvSpPr>
-          <p:cNvPr id="7" name="Shape 5"/>
+              <a:t>体感の失敗率</a:t>
+            </a:r>
+            <a:endParaRPr lang="en-US" sz="1400" dirty="0"/>
+          </a:p>
+        </p:txBody>
+      </p:sp>
+      <p:sp>
+        <p:nvSpPr>
+          <p:cNvPr id="8" name="Text 6"/>
+          <p:cNvSpPr txBox="1"/>
+          <p:nvPr/>
+        </p:nvSpPr>
+        <p:spPr>
+          <a:xfrm>
+            <a:off x="7315200" y="2148840"/>
+            <a:ext cx="4297680" cy="914400"/>
+          </a:xfrm>
+          <a:prstGeom prst="rect">
+            <a:avLst/>
+          </a:prstGeom>
+          <a:noFill/>
+          <a:ln/>
+        </p:spPr>
+        <p:txBody>
+          <a:bodyPr wrap="square" lIns="0" tIns="0" rIns="0" bIns="0" rtlCol="0" anchor="ctr"/>
+          <a:lstStyle/>
+          <a:p>
+            <a:pPr algn="ctr" indent="0" marL="0">
+              <a:buNone/>
+            </a:pPr>
+            <a:r>
+              <a:rPr lang="en-US" sz="4600" b="1" dirty="0">
+                <a:solidFill>
+                  <a:srgbClr val="E63946"/>
+                </a:solidFill>
+                <a:latin typeface="Cambria" pitchFamily="34" charset="0"/>
+                <a:ea typeface="Cambria" pitchFamily="34" charset="-122"/>
+                <a:cs typeface="Cambria" pitchFamily="34" charset="-120"/>
+              </a:rPr>
+              <a:t>約2割</a:t>
+            </a:r>
+            <a:endParaRPr lang="en-US" sz="4600" dirty="0"/>
+          </a:p>
+        </p:txBody>
+      </p:sp>
+      <p:sp>
+        <p:nvSpPr>
+          <p:cNvPr id="9" name="Text 7"/>
+          <p:cNvSpPr txBox="1"/>
+          <p:nvPr/>
+        </p:nvSpPr>
+        <p:spPr>
+          <a:xfrm>
+            <a:off x="7589520" y="3108960"/>
+            <a:ext cx="3749040" cy="457200"/>
+          </a:xfrm>
+          <a:prstGeom prst="rect">
+            <a:avLst/>
+          </a:prstGeom>
+          <a:noFill/>
+          <a:ln/>
+        </p:spPr>
+        <p:txBody>
+          <a:bodyPr wrap="square" lIns="0" tIns="0" rIns="0" bIns="0" rtlCol="0" anchor="ctr"/>
+          <a:lstStyle/>
+          <a:p>
+            <a:pPr algn="ctr" indent="0" marL="0">
+              <a:buNone/>
+            </a:pPr>
+            <a:r>
+              <a:rPr lang="en-US" sz="1200" dirty="0">
+                <a:solidFill>
+                  <a:srgbClr val="7A2E33"/>
+                </a:solidFill>
+                <a:latin typeface="Calibri" pitchFamily="34" charset="0"/>
+                <a:ea typeface="Calibri" pitchFamily="34" charset="-122"/>
+                <a:cs typeface="Calibri" pitchFamily="34" charset="-120"/>
+              </a:rPr>
+              <a:t>10回に2回くらいは、何かしら失敗する</a:t>
+            </a:r>
+            <a:endParaRPr lang="en-US" sz="1200" dirty="0"/>
+          </a:p>
+        </p:txBody>
+      </p:sp>
+      <p:sp>
+        <p:nvSpPr>
+          <p:cNvPr id="10" name="Shape 8"/>
           <p:cNvSpPr/>
           <p:nvPr/>
         </p:nvSpPr>
         <p:spPr>
           <a:xfrm>
-            <a:off x="8133588" y="2286000"/>
-            <a:ext cx="777240" cy="777240"/>
+            <a:off x="8485632" y="3703320"/>
+            <a:ext cx="566928" cy="566928"/>
+          </a:xfrm>
+          <a:prstGeom prst="ellipse">
+            <a:avLst/>
+          </a:prstGeom>
+          <a:solidFill>
+            <a:srgbClr val="02C39A"/>
+          </a:solidFill>
+          <a:ln/>
+        </p:spPr>
+      </p:sp>
+      <p:sp>
+        <p:nvSpPr>
+          <p:cNvPr id="11" name="Text 9"/>
+          <p:cNvSpPr txBox="1"/>
+          <p:nvPr/>
+        </p:nvSpPr>
+        <p:spPr>
+          <a:xfrm>
+            <a:off x="8485632" y="3703320"/>
+            <a:ext cx="566928" cy="566928"/>
+          </a:xfrm>
+          <a:prstGeom prst="rect">
+            <a:avLst/>
+          </a:prstGeom>
+          <a:noFill/>
+          <a:ln/>
+        </p:spPr>
+        <p:txBody>
+          <a:bodyPr wrap="square" lIns="0" tIns="0" rIns="0" bIns="0" rtlCol="0" anchor="ctr"/>
+          <a:lstStyle/>
+          <a:p>
+            <a:pPr algn="ctr" indent="0" marL="0">
+              <a:buNone/>
+            </a:pPr>
+            <a:r>
+              <a:rPr lang="en-US" sz="2100" b="1" dirty="0">
+                <a:solidFill>
+                  <a:srgbClr val="FFFFFF"/>
+                </a:solidFill>
+                <a:latin typeface="Calibri" pitchFamily="34" charset="0"/>
+                <a:ea typeface="Calibri" pitchFamily="34" charset="-122"/>
+                <a:cs typeface="Calibri" pitchFamily="34" charset="-120"/>
+              </a:rPr>
+              <a:t>✓</a:t>
+            </a:r>
+            <a:endParaRPr lang="en-US" sz="2100" dirty="0"/>
+          </a:p>
+        </p:txBody>
+      </p:sp>
+      <p:sp>
+        <p:nvSpPr>
+          <p:cNvPr id="12" name="Shape 10"/>
+          <p:cNvSpPr/>
+          <p:nvPr/>
+        </p:nvSpPr>
+        <p:spPr>
+          <a:xfrm>
+            <a:off x="9180576" y="3703320"/>
+            <a:ext cx="566928" cy="566928"/>
+          </a:xfrm>
+          <a:prstGeom prst="ellipse">
+            <a:avLst/>
+          </a:prstGeom>
+          <a:solidFill>
+            <a:srgbClr val="02C39A"/>
+          </a:solidFill>
+          <a:ln/>
+        </p:spPr>
+      </p:sp>
+      <p:sp>
+        <p:nvSpPr>
+          <p:cNvPr id="13" name="Text 11"/>
+          <p:cNvSpPr txBox="1"/>
+          <p:nvPr/>
+        </p:nvSpPr>
+        <p:spPr>
+          <a:xfrm>
+            <a:off x="9180576" y="3703320"/>
+            <a:ext cx="566928" cy="566928"/>
+          </a:xfrm>
+          <a:prstGeom prst="rect">
+            <a:avLst/>
+          </a:prstGeom>
+          <a:noFill/>
+          <a:ln/>
+        </p:spPr>
+        <p:txBody>
+          <a:bodyPr wrap="square" lIns="0" tIns="0" rIns="0" bIns="0" rtlCol="0" anchor="ctr"/>
+          <a:lstStyle/>
+          <a:p>
+            <a:pPr algn="ctr" indent="0" marL="0">
+              <a:buNone/>
+            </a:pPr>
+            <a:r>
+              <a:rPr lang="en-US" sz="2100" b="1" dirty="0">
+                <a:solidFill>
+                  <a:srgbClr val="FFFFFF"/>
+                </a:solidFill>
+                <a:latin typeface="Calibri" pitchFamily="34" charset="0"/>
+                <a:ea typeface="Calibri" pitchFamily="34" charset="-122"/>
+                <a:cs typeface="Calibri" pitchFamily="34" charset="-120"/>
+              </a:rPr>
+              <a:t>✓</a:t>
+            </a:r>
+            <a:endParaRPr lang="en-US" sz="2100" dirty="0"/>
+          </a:p>
+        </p:txBody>
+      </p:sp>
+      <p:sp>
+        <p:nvSpPr>
+          <p:cNvPr id="14" name="Shape 12"/>
+          <p:cNvSpPr/>
+          <p:nvPr/>
+        </p:nvSpPr>
+        <p:spPr>
+          <a:xfrm>
+            <a:off x="9875520" y="3703320"/>
+            <a:ext cx="566928" cy="566928"/>
           </a:xfrm>
           <a:prstGeom prst="ellipse">
             <a:avLst/>
@@ -3977,14 +4212,14 @@
       </p:sp>
       <p:sp>
         <p:nvSpPr>
-          <p:cNvPr id="8" name="Text 6"/>
-          <p:cNvSpPr txBox="1"/>
-          <p:nvPr/>
-        </p:nvSpPr>
-        <p:spPr>
-          <a:xfrm>
-            <a:off x="8133588" y="2286000"/>
-            <a:ext cx="777240" cy="777240"/>
+          <p:cNvPr id="15" name="Text 13"/>
+          <p:cNvSpPr txBox="1"/>
+          <p:nvPr/>
+        </p:nvSpPr>
+        <p:spPr>
+          <a:xfrm>
+            <a:off x="9875520" y="3703320"/>
+            <a:ext cx="566928" cy="566928"/>
           </a:xfrm>
           <a:prstGeom prst="rect">
             <a:avLst/>
@@ -4000,7 +4235,7 @@
               <a:buNone/>
             </a:pPr>
             <a:r>
-              <a:rPr lang="en-US" sz="2900" b="1" dirty="0">
+              <a:rPr lang="en-US" sz="2100" b="1" dirty="0">
                 <a:solidFill>
                   <a:srgbClr val="FFFFFF"/>
                 </a:solidFill>
@@ -4010,20 +4245,197 @@
               </a:rPr>
               <a:t>✗</a:t>
             </a:r>
-            <a:endParaRPr lang="en-US" sz="2900" dirty="0"/>
-          </a:p>
-        </p:txBody>
-      </p:sp>
-      <p:sp>
-        <p:nvSpPr>
-          <p:cNvPr id="9" name="Shape 7"/>
+            <a:endParaRPr lang="en-US" sz="2100" dirty="0"/>
+          </a:p>
+        </p:txBody>
+      </p:sp>
+      <p:sp>
+        <p:nvSpPr>
+          <p:cNvPr id="16" name="Shape 14"/>
           <p:cNvSpPr/>
           <p:nvPr/>
         </p:nvSpPr>
         <p:spPr>
           <a:xfrm>
-            <a:off x="9075420" y="2286000"/>
-            <a:ext cx="777240" cy="777240"/>
+            <a:off x="8485632" y="4398264"/>
+            <a:ext cx="566928" cy="566928"/>
+          </a:xfrm>
+          <a:prstGeom prst="ellipse">
+            <a:avLst/>
+          </a:prstGeom>
+          <a:solidFill>
+            <a:srgbClr val="02C39A"/>
+          </a:solidFill>
+          <a:ln/>
+        </p:spPr>
+      </p:sp>
+      <p:sp>
+        <p:nvSpPr>
+          <p:cNvPr id="17" name="Text 15"/>
+          <p:cNvSpPr txBox="1"/>
+          <p:nvPr/>
+        </p:nvSpPr>
+        <p:spPr>
+          <a:xfrm>
+            <a:off x="8485632" y="4398264"/>
+            <a:ext cx="566928" cy="566928"/>
+          </a:xfrm>
+          <a:prstGeom prst="rect">
+            <a:avLst/>
+          </a:prstGeom>
+          <a:noFill/>
+          <a:ln/>
+        </p:spPr>
+        <p:txBody>
+          <a:bodyPr wrap="square" lIns="0" tIns="0" rIns="0" bIns="0" rtlCol="0" anchor="ctr"/>
+          <a:lstStyle/>
+          <a:p>
+            <a:pPr algn="ctr" indent="0" marL="0">
+              <a:buNone/>
+            </a:pPr>
+            <a:r>
+              <a:rPr lang="en-US" sz="2100" b="1" dirty="0">
+                <a:solidFill>
+                  <a:srgbClr val="FFFFFF"/>
+                </a:solidFill>
+                <a:latin typeface="Calibri" pitchFamily="34" charset="0"/>
+                <a:ea typeface="Calibri" pitchFamily="34" charset="-122"/>
+                <a:cs typeface="Calibri" pitchFamily="34" charset="-120"/>
+              </a:rPr>
+              <a:t>✓</a:t>
+            </a:r>
+            <a:endParaRPr lang="en-US" sz="2100" dirty="0"/>
+          </a:p>
+        </p:txBody>
+      </p:sp>
+      <p:sp>
+        <p:nvSpPr>
+          <p:cNvPr id="18" name="Shape 16"/>
+          <p:cNvSpPr/>
+          <p:nvPr/>
+        </p:nvSpPr>
+        <p:spPr>
+          <a:xfrm>
+            <a:off x="9180576" y="4398264"/>
+            <a:ext cx="566928" cy="566928"/>
+          </a:xfrm>
+          <a:prstGeom prst="ellipse">
+            <a:avLst/>
+          </a:prstGeom>
+          <a:solidFill>
+            <a:srgbClr val="02C39A"/>
+          </a:solidFill>
+          <a:ln/>
+        </p:spPr>
+      </p:sp>
+      <p:sp>
+        <p:nvSpPr>
+          <p:cNvPr id="19" name="Text 17"/>
+          <p:cNvSpPr txBox="1"/>
+          <p:nvPr/>
+        </p:nvSpPr>
+        <p:spPr>
+          <a:xfrm>
+            <a:off x="9180576" y="4398264"/>
+            <a:ext cx="566928" cy="566928"/>
+          </a:xfrm>
+          <a:prstGeom prst="rect">
+            <a:avLst/>
+          </a:prstGeom>
+          <a:noFill/>
+          <a:ln/>
+        </p:spPr>
+        <p:txBody>
+          <a:bodyPr wrap="square" lIns="0" tIns="0" rIns="0" bIns="0" rtlCol="0" anchor="ctr"/>
+          <a:lstStyle/>
+          <a:p>
+            <a:pPr algn="ctr" indent="0" marL="0">
+              <a:buNone/>
+            </a:pPr>
+            <a:r>
+              <a:rPr lang="en-US" sz="2100" b="1" dirty="0">
+                <a:solidFill>
+                  <a:srgbClr val="FFFFFF"/>
+                </a:solidFill>
+                <a:latin typeface="Calibri" pitchFamily="34" charset="0"/>
+                <a:ea typeface="Calibri" pitchFamily="34" charset="-122"/>
+                <a:cs typeface="Calibri" pitchFamily="34" charset="-120"/>
+              </a:rPr>
+              <a:t>✓</a:t>
+            </a:r>
+            <a:endParaRPr lang="en-US" sz="2100" dirty="0"/>
+          </a:p>
+        </p:txBody>
+      </p:sp>
+      <p:sp>
+        <p:nvSpPr>
+          <p:cNvPr id="20" name="Shape 18"/>
+          <p:cNvSpPr/>
+          <p:nvPr/>
+        </p:nvSpPr>
+        <p:spPr>
+          <a:xfrm>
+            <a:off x="9875520" y="4398264"/>
+            <a:ext cx="566928" cy="566928"/>
+          </a:xfrm>
+          <a:prstGeom prst="ellipse">
+            <a:avLst/>
+          </a:prstGeom>
+          <a:solidFill>
+            <a:srgbClr val="02C39A"/>
+          </a:solidFill>
+          <a:ln/>
+        </p:spPr>
+      </p:sp>
+      <p:sp>
+        <p:nvSpPr>
+          <p:cNvPr id="21" name="Text 19"/>
+          <p:cNvSpPr txBox="1"/>
+          <p:nvPr/>
+        </p:nvSpPr>
+        <p:spPr>
+          <a:xfrm>
+            <a:off x="9875520" y="4398264"/>
+            <a:ext cx="566928" cy="566928"/>
+          </a:xfrm>
+          <a:prstGeom prst="rect">
+            <a:avLst/>
+          </a:prstGeom>
+          <a:noFill/>
+          <a:ln/>
+        </p:spPr>
+        <p:txBody>
+          <a:bodyPr wrap="square" lIns="0" tIns="0" rIns="0" bIns="0" rtlCol="0" anchor="ctr"/>
+          <a:lstStyle/>
+          <a:p>
+            <a:pPr algn="ctr" indent="0" marL="0">
+              <a:buNone/>
+            </a:pPr>
+            <a:r>
+              <a:rPr lang="en-US" sz="2100" b="1" dirty="0">
+                <a:solidFill>
+                  <a:srgbClr val="FFFFFF"/>
+                </a:solidFill>
+                <a:latin typeface="Calibri" pitchFamily="34" charset="0"/>
+                <a:ea typeface="Calibri" pitchFamily="34" charset="-122"/>
+                <a:cs typeface="Calibri" pitchFamily="34" charset="-120"/>
+              </a:rPr>
+              <a:t>✓</a:t>
+            </a:r>
+            <a:endParaRPr lang="en-US" sz="2100" dirty="0"/>
+          </a:p>
+        </p:txBody>
+      </p:sp>
+      <p:sp>
+        <p:nvSpPr>
+          <p:cNvPr id="22" name="Shape 20"/>
+          <p:cNvSpPr/>
+          <p:nvPr/>
+        </p:nvSpPr>
+        <p:spPr>
+          <a:xfrm>
+            <a:off x="8485632" y="5093208"/>
+            <a:ext cx="566928" cy="566928"/>
           </a:xfrm>
           <a:prstGeom prst="ellipse">
             <a:avLst/>
@@ -4036,14 +4448,14 @@
       </p:sp>
       <p:sp>
         <p:nvSpPr>
-          <p:cNvPr id="10" name="Text 8"/>
-          <p:cNvSpPr txBox="1"/>
-          <p:nvPr/>
-        </p:nvSpPr>
-        <p:spPr>
-          <a:xfrm>
-            <a:off x="9075420" y="2286000"/>
-            <a:ext cx="777240" cy="777240"/>
+          <p:cNvPr id="23" name="Text 21"/>
+          <p:cNvSpPr txBox="1"/>
+          <p:nvPr/>
+        </p:nvSpPr>
+        <p:spPr>
+          <a:xfrm>
+            <a:off x="8485632" y="5093208"/>
+            <a:ext cx="566928" cy="566928"/>
           </a:xfrm>
           <a:prstGeom prst="rect">
             <a:avLst/>
@@ -4059,7 +4471,7 @@
               <a:buNone/>
             </a:pPr>
             <a:r>
-              <a:rPr lang="en-US" sz="2900" b="1" dirty="0">
+              <a:rPr lang="en-US" sz="2100" b="1" dirty="0">
                 <a:solidFill>
                   <a:srgbClr val="FFFFFF"/>
                 </a:solidFill>
@@ -4069,20 +4481,20 @@
               </a:rPr>
               <a:t>✗</a:t>
             </a:r>
-            <a:endParaRPr lang="en-US" sz="2900" dirty="0"/>
-          </a:p>
-        </p:txBody>
-      </p:sp>
-      <p:sp>
-        <p:nvSpPr>
-          <p:cNvPr id="11" name="Shape 9"/>
+            <a:endParaRPr lang="en-US" sz="2100" dirty="0"/>
+          </a:p>
+        </p:txBody>
+      </p:sp>
+      <p:sp>
+        <p:nvSpPr>
+          <p:cNvPr id="24" name="Shape 22"/>
           <p:cNvSpPr/>
           <p:nvPr/>
         </p:nvSpPr>
         <p:spPr>
           <a:xfrm>
-            <a:off x="10017252" y="2286000"/>
-            <a:ext cx="777240" cy="777240"/>
+            <a:off x="9180576" y="5093208"/>
+            <a:ext cx="566928" cy="566928"/>
           </a:xfrm>
           <a:prstGeom prst="ellipse">
             <a:avLst/>
@@ -4095,14 +4507,14 @@
       </p:sp>
       <p:sp>
         <p:nvSpPr>
-          <p:cNvPr id="12" name="Text 10"/>
-          <p:cNvSpPr txBox="1"/>
-          <p:nvPr/>
-        </p:nvSpPr>
-        <p:spPr>
-          <a:xfrm>
-            <a:off x="10017252" y="2286000"/>
-            <a:ext cx="777240" cy="777240"/>
+          <p:cNvPr id="25" name="Text 23"/>
+          <p:cNvSpPr txBox="1"/>
+          <p:nvPr/>
+        </p:nvSpPr>
+        <p:spPr>
+          <a:xfrm>
+            <a:off x="9180576" y="5093208"/>
+            <a:ext cx="566928" cy="566928"/>
           </a:xfrm>
           <a:prstGeom prst="rect">
             <a:avLst/>
@@ -4118,7 +4530,7 @@
               <a:buNone/>
             </a:pPr>
             <a:r>
-              <a:rPr lang="en-US" sz="2900" b="1" dirty="0">
+              <a:rPr lang="en-US" sz="2100" b="1" dirty="0">
                 <a:solidFill>
                   <a:srgbClr val="FFFFFF"/>
                 </a:solidFill>
@@ -4128,79 +4540,20 @@
               </a:rPr>
               <a:t>✓</a:t>
             </a:r>
-            <a:endParaRPr lang="en-US" sz="2900" dirty="0"/>
-          </a:p>
-        </p:txBody>
-      </p:sp>
-      <p:sp>
-        <p:nvSpPr>
-          <p:cNvPr id="13" name="Shape 11"/>
+            <a:endParaRPr lang="en-US" sz="2100" dirty="0"/>
+          </a:p>
+        </p:txBody>
+      </p:sp>
+      <p:sp>
+        <p:nvSpPr>
+          <p:cNvPr id="26" name="Shape 24"/>
           <p:cNvSpPr/>
           <p:nvPr/>
         </p:nvSpPr>
         <p:spPr>
           <a:xfrm>
-            <a:off x="8133588" y="3227832"/>
-            <a:ext cx="777240" cy="777240"/>
-          </a:xfrm>
-          <a:prstGeom prst="ellipse">
-            <a:avLst/>
-          </a:prstGeom>
-          <a:solidFill>
-            <a:srgbClr val="E63946"/>
-          </a:solidFill>
-          <a:ln/>
-        </p:spPr>
-      </p:sp>
-      <p:sp>
-        <p:nvSpPr>
-          <p:cNvPr id="14" name="Text 12"/>
-          <p:cNvSpPr txBox="1"/>
-          <p:nvPr/>
-        </p:nvSpPr>
-        <p:spPr>
-          <a:xfrm>
-            <a:off x="8133588" y="3227832"/>
-            <a:ext cx="777240" cy="777240"/>
-          </a:xfrm>
-          <a:prstGeom prst="rect">
-            <a:avLst/>
-          </a:prstGeom>
-          <a:noFill/>
-          <a:ln/>
-        </p:spPr>
-        <p:txBody>
-          <a:bodyPr wrap="square" lIns="0" tIns="0" rIns="0" bIns="0" rtlCol="0" anchor="ctr"/>
-          <a:lstStyle/>
-          <a:p>
-            <a:pPr algn="ctr" indent="0" marL="0">
-              <a:buNone/>
-            </a:pPr>
-            <a:r>
-              <a:rPr lang="en-US" sz="2900" b="1" dirty="0">
-                <a:solidFill>
-                  <a:srgbClr val="FFFFFF"/>
-                </a:solidFill>
-                <a:latin typeface="Calibri" pitchFamily="34" charset="0"/>
-                <a:ea typeface="Calibri" pitchFamily="34" charset="-122"/>
-                <a:cs typeface="Calibri" pitchFamily="34" charset="-120"/>
-              </a:rPr>
-              <a:t>✗</a:t>
-            </a:r>
-            <a:endParaRPr lang="en-US" sz="2900" dirty="0"/>
-          </a:p>
-        </p:txBody>
-      </p:sp>
-      <p:sp>
-        <p:nvSpPr>
-          <p:cNvPr id="15" name="Shape 13"/>
-          <p:cNvSpPr/>
-          <p:nvPr/>
-        </p:nvSpPr>
-        <p:spPr>
-          <a:xfrm>
-            <a:off x="9075420" y="3227832"/>
-            <a:ext cx="777240" cy="777240"/>
+            <a:off x="9875520" y="5093208"/>
+            <a:ext cx="566928" cy="566928"/>
           </a:xfrm>
           <a:prstGeom prst="ellipse">
             <a:avLst/>
@@ -4213,14 +4566,14 @@
       </p:sp>
       <p:sp>
         <p:nvSpPr>
-          <p:cNvPr id="16" name="Text 14"/>
-          <p:cNvSpPr txBox="1"/>
-          <p:nvPr/>
-        </p:nvSpPr>
-        <p:spPr>
-          <a:xfrm>
-            <a:off x="9075420" y="3227832"/>
-            <a:ext cx="777240" cy="777240"/>
+          <p:cNvPr id="27" name="Text 25"/>
+          <p:cNvSpPr txBox="1"/>
+          <p:nvPr/>
+        </p:nvSpPr>
+        <p:spPr>
+          <a:xfrm>
+            <a:off x="9875520" y="5093208"/>
+            <a:ext cx="566928" cy="566928"/>
           </a:xfrm>
           <a:prstGeom prst="rect">
             <a:avLst/>
@@ -4236,7 +4589,7 @@
               <a:buNone/>
             </a:pPr>
             <a:r>
-              <a:rPr lang="en-US" sz="2900" b="1" dirty="0">
+              <a:rPr lang="en-US" sz="2100" b="1" dirty="0">
                 <a:solidFill>
                   <a:srgbClr val="FFFFFF"/>
                 </a:solidFill>
@@ -4246,249 +4599,13 @@
               </a:rPr>
               <a:t>✓</a:t>
             </a:r>
-            <a:endParaRPr lang="en-US" sz="2900" dirty="0"/>
-          </a:p>
-        </p:txBody>
-      </p:sp>
-      <p:sp>
-        <p:nvSpPr>
-          <p:cNvPr id="17" name="Shape 15"/>
-          <p:cNvSpPr/>
-          <p:nvPr/>
-        </p:nvSpPr>
-        <p:spPr>
-          <a:xfrm>
-            <a:off x="10017252" y="3227832"/>
-            <a:ext cx="777240" cy="777240"/>
-          </a:xfrm>
-          <a:prstGeom prst="ellipse">
-            <a:avLst/>
-          </a:prstGeom>
-          <a:solidFill>
-            <a:srgbClr val="E63946"/>
-          </a:solidFill>
-          <a:ln/>
-        </p:spPr>
-      </p:sp>
-      <p:sp>
-        <p:nvSpPr>
-          <p:cNvPr id="18" name="Text 16"/>
-          <p:cNvSpPr txBox="1"/>
-          <p:nvPr/>
-        </p:nvSpPr>
-        <p:spPr>
-          <a:xfrm>
-            <a:off x="10017252" y="3227832"/>
-            <a:ext cx="777240" cy="777240"/>
-          </a:xfrm>
-          <a:prstGeom prst="rect">
-            <a:avLst/>
-          </a:prstGeom>
-          <a:noFill/>
-          <a:ln/>
-        </p:spPr>
-        <p:txBody>
-          <a:bodyPr wrap="square" lIns="0" tIns="0" rIns="0" bIns="0" rtlCol="0" anchor="ctr"/>
-          <a:lstStyle/>
-          <a:p>
-            <a:pPr algn="ctr" indent="0" marL="0">
-              <a:buNone/>
-            </a:pPr>
-            <a:r>
-              <a:rPr lang="en-US" sz="2900" b="1" dirty="0">
-                <a:solidFill>
-                  <a:srgbClr val="FFFFFF"/>
-                </a:solidFill>
-                <a:latin typeface="Calibri" pitchFamily="34" charset="0"/>
-                <a:ea typeface="Calibri" pitchFamily="34" charset="-122"/>
-                <a:cs typeface="Calibri" pitchFamily="34" charset="-120"/>
-              </a:rPr>
-              <a:t>✗</a:t>
-            </a:r>
-            <a:endParaRPr lang="en-US" sz="2900" dirty="0"/>
-          </a:p>
-        </p:txBody>
-      </p:sp>
-      <p:sp>
-        <p:nvSpPr>
-          <p:cNvPr id="19" name="Shape 17"/>
-          <p:cNvSpPr/>
-          <p:nvPr/>
-        </p:nvSpPr>
-        <p:spPr>
-          <a:xfrm>
-            <a:off x="8133588" y="4169664"/>
-            <a:ext cx="777240" cy="777240"/>
-          </a:xfrm>
-          <a:prstGeom prst="ellipse">
-            <a:avLst/>
-          </a:prstGeom>
-          <a:solidFill>
-            <a:srgbClr val="E63946"/>
-          </a:solidFill>
-          <a:ln/>
-        </p:spPr>
-      </p:sp>
-      <p:sp>
-        <p:nvSpPr>
-          <p:cNvPr id="20" name="Text 18"/>
-          <p:cNvSpPr txBox="1"/>
-          <p:nvPr/>
-        </p:nvSpPr>
-        <p:spPr>
-          <a:xfrm>
-            <a:off x="8133588" y="4169664"/>
-            <a:ext cx="777240" cy="777240"/>
-          </a:xfrm>
-          <a:prstGeom prst="rect">
-            <a:avLst/>
-          </a:prstGeom>
-          <a:noFill/>
-          <a:ln/>
-        </p:spPr>
-        <p:txBody>
-          <a:bodyPr wrap="square" lIns="0" tIns="0" rIns="0" bIns="0" rtlCol="0" anchor="ctr"/>
-          <a:lstStyle/>
-          <a:p>
-            <a:pPr algn="ctr" indent="0" marL="0">
-              <a:buNone/>
-            </a:pPr>
-            <a:r>
-              <a:rPr lang="en-US" sz="2900" b="1" dirty="0">
-                <a:solidFill>
-                  <a:srgbClr val="FFFFFF"/>
-                </a:solidFill>
-                <a:latin typeface="Calibri" pitchFamily="34" charset="0"/>
-                <a:ea typeface="Calibri" pitchFamily="34" charset="-122"/>
-                <a:cs typeface="Calibri" pitchFamily="34" charset="-120"/>
-              </a:rPr>
-              <a:t>✗</a:t>
-            </a:r>
-            <a:endParaRPr lang="en-US" sz="2900" dirty="0"/>
-          </a:p>
-        </p:txBody>
-      </p:sp>
-      <p:sp>
-        <p:nvSpPr>
-          <p:cNvPr id="21" name="Shape 19"/>
-          <p:cNvSpPr/>
-          <p:nvPr/>
-        </p:nvSpPr>
-        <p:spPr>
-          <a:xfrm>
-            <a:off x="9075420" y="4169664"/>
-            <a:ext cx="777240" cy="777240"/>
-          </a:xfrm>
-          <a:prstGeom prst="ellipse">
-            <a:avLst/>
-          </a:prstGeom>
-          <a:solidFill>
-            <a:srgbClr val="E63946"/>
-          </a:solidFill>
-          <a:ln/>
-        </p:spPr>
-      </p:sp>
-      <p:sp>
-        <p:nvSpPr>
-          <p:cNvPr id="22" name="Text 20"/>
-          <p:cNvSpPr txBox="1"/>
-          <p:nvPr/>
-        </p:nvSpPr>
-        <p:spPr>
-          <a:xfrm>
-            <a:off x="9075420" y="4169664"/>
-            <a:ext cx="777240" cy="777240"/>
-          </a:xfrm>
-          <a:prstGeom prst="rect">
-            <a:avLst/>
-          </a:prstGeom>
-          <a:noFill/>
-          <a:ln/>
-        </p:spPr>
-        <p:txBody>
-          <a:bodyPr wrap="square" lIns="0" tIns="0" rIns="0" bIns="0" rtlCol="0" anchor="ctr"/>
-          <a:lstStyle/>
-          <a:p>
-            <a:pPr algn="ctr" indent="0" marL="0">
-              <a:buNone/>
-            </a:pPr>
-            <a:r>
-              <a:rPr lang="en-US" sz="2900" b="1" dirty="0">
-                <a:solidFill>
-                  <a:srgbClr val="FFFFFF"/>
-                </a:solidFill>
-                <a:latin typeface="Calibri" pitchFamily="34" charset="0"/>
-                <a:ea typeface="Calibri" pitchFamily="34" charset="-122"/>
-                <a:cs typeface="Calibri" pitchFamily="34" charset="-120"/>
-              </a:rPr>
-              <a:t>✗</a:t>
-            </a:r>
-            <a:endParaRPr lang="en-US" sz="2900" dirty="0"/>
-          </a:p>
-        </p:txBody>
-      </p:sp>
-      <p:sp>
-        <p:nvSpPr>
-          <p:cNvPr id="23" name="Shape 21"/>
-          <p:cNvSpPr/>
-          <p:nvPr/>
-        </p:nvSpPr>
-        <p:spPr>
-          <a:xfrm>
-            <a:off x="10017252" y="4169664"/>
-            <a:ext cx="777240" cy="777240"/>
-          </a:xfrm>
-          <a:prstGeom prst="ellipse">
-            <a:avLst/>
-          </a:prstGeom>
-          <a:solidFill>
-            <a:srgbClr val="02C39A"/>
-          </a:solidFill>
-          <a:ln/>
-        </p:spPr>
-      </p:sp>
-      <p:sp>
-        <p:nvSpPr>
-          <p:cNvPr id="24" name="Text 22"/>
-          <p:cNvSpPr txBox="1"/>
-          <p:nvPr/>
-        </p:nvSpPr>
-        <p:spPr>
-          <a:xfrm>
-            <a:off x="10017252" y="4169664"/>
-            <a:ext cx="777240" cy="777240"/>
-          </a:xfrm>
-          <a:prstGeom prst="rect">
-            <a:avLst/>
-          </a:prstGeom>
-          <a:noFill/>
-          <a:ln/>
-        </p:spPr>
-        <p:txBody>
-          <a:bodyPr wrap="square" lIns="0" tIns="0" rIns="0" bIns="0" rtlCol="0" anchor="ctr"/>
-          <a:lstStyle/>
-          <a:p>
-            <a:pPr algn="ctr" indent="0" marL="0">
-              <a:buNone/>
-            </a:pPr>
-            <a:r>
-              <a:rPr lang="en-US" sz="2900" b="1" dirty="0">
-                <a:solidFill>
-                  <a:srgbClr val="FFFFFF"/>
-                </a:solidFill>
-                <a:latin typeface="Calibri" pitchFamily="34" charset="0"/>
-                <a:ea typeface="Calibri" pitchFamily="34" charset="-122"/>
-                <a:cs typeface="Calibri" pitchFamily="34" charset="-120"/>
-              </a:rPr>
-              <a:t>✓</a:t>
-            </a:r>
-            <a:endParaRPr lang="en-US" sz="2900" dirty="0"/>
-          </a:p>
-        </p:txBody>
-      </p:sp>
-      <p:sp>
-        <p:nvSpPr>
-          <p:cNvPr id="26" name="Text 23"/>
+            <a:endParaRPr lang="en-US" sz="2100" dirty="0"/>
+          </a:p>
+        </p:txBody>
+      </p:sp>
+      <p:sp>
+        <p:nvSpPr>
+          <p:cNvPr id="29" name="Text 26"/>
           <p:cNvSpPr txBox="1"/>
           <p:nvPr/>
         </p:nvSpPr>
@@ -4759,7 +4876,7 @@
                 <a:ea typeface="Calibri" pitchFamily="34" charset="-122"/>
                 <a:cs typeface="Calibri" pitchFamily="34" charset="-120"/>
               </a:rPr>
-              <a:t>テストを実行</a:t>
+              <a:t>テストが落ちる</a:t>
             </a:r>
             <a:endParaRPr lang="en-US" sz="1400" dirty="0"/>
           </a:p>
@@ -4905,7 +5022,7 @@
                 <a:ea typeface="Calibri" pitchFamily="34" charset="-122"/>
                 <a:cs typeface="Calibri" pitchFamily="34" charset="-120"/>
               </a:rPr>
-              <a:t>落ちたケースがある</a:t>
+              <a:t>ログ・エラーを確認</a:t>
             </a:r>
             <a:endParaRPr lang="en-US" sz="1400" dirty="0"/>
           </a:p>
@@ -5051,7 +5168,7 @@
                 <a:ea typeface="Calibri" pitchFamily="34" charset="-122"/>
                 <a:cs typeface="Calibri" pitchFamily="34" charset="-120"/>
               </a:rPr>
-              <a:t>再実行 or 手動で確認</a:t>
+              <a:t>分からなければ再実行</a:t>
             </a:r>
             <a:endParaRPr lang="en-US" sz="1400" dirty="0"/>
           </a:p>
@@ -5212,7 +5329,7 @@
         <p:spPr>
           <a:xfrm>
             <a:off x="548640" y="4937760"/>
-            <a:ext cx="11064240" cy="548640"/>
+            <a:ext cx="11064240" cy="457200"/>
           </a:xfrm>
           <a:prstGeom prst="rect">
             <a:avLst/>
@@ -5244,7 +5361,46 @@
       </p:sp>
       <p:sp>
         <p:nvSpPr>
-          <p:cNvPr id="21" name="Text 18"/>
+          <p:cNvPr id="20" name="Text 18"/>
+          <p:cNvSpPr txBox="1"/>
+          <p:nvPr/>
+        </p:nvSpPr>
+        <p:spPr>
+          <a:xfrm>
+            <a:off x="548640" y="5440680"/>
+            <a:ext cx="11064240" cy="457200"/>
+          </a:xfrm>
+          <a:prstGeom prst="rect">
+            <a:avLst/>
+          </a:prstGeom>
+          <a:noFill/>
+          <a:ln/>
+        </p:spPr>
+        <p:txBody>
+          <a:bodyPr wrap="square" lIns="0" tIns="0" rIns="0" bIns="0" rtlCol="0" anchor="ctr"/>
+          <a:lstStyle/>
+          <a:p>
+            <a:pPr algn="ctr" indent="0" marL="0">
+              <a:buNone/>
+            </a:pPr>
+            <a:r>
+              <a:rPr lang="en-US" sz="1200" i="1" dirty="0">
+                <a:solidFill>
+                  <a:srgbClr val="9AA5A9"/>
+                </a:solidFill>
+                <a:latin typeface="Calibri" pitchFamily="34" charset="0"/>
+                <a:ea typeface="Calibri" pitchFamily="34" charset="-122"/>
+                <a:cs typeface="Calibri" pitchFamily="34" charset="-120"/>
+              </a:rPr>
+              <a:t>(正直、開発環境に自信がなくて、プロジェクトの外からコマンドで実行しています)</a:t>
+            </a:r>
+            <a:endParaRPr lang="en-US" sz="1200" dirty="0"/>
+          </a:p>
+        </p:txBody>
+      </p:sp>
+      <p:sp>
+        <p:nvSpPr>
+          <p:cNvPr id="22" name="Text 19"/>
           <p:cNvSpPr txBox="1"/>
           <p:nvPr/>
         </p:nvSpPr>
@@ -5527,7 +5683,46 @@
         <p:spPr>
           <a:xfrm>
             <a:off x="960120" y="2880360"/>
-            <a:ext cx="4572000" cy="2560320"/>
+            <a:ext cx="4572000" cy="822960"/>
+          </a:xfrm>
+          <a:prstGeom prst="rect">
+            <a:avLst/>
+          </a:prstGeom>
+          <a:noFill/>
+          <a:ln/>
+        </p:spPr>
+        <p:txBody>
+          <a:bodyPr wrap="square" lIns="0" tIns="0" rIns="0" bIns="0" rtlCol="0" anchor="ctr"/>
+          <a:lstStyle/>
+          <a:p>
+            <a:pPr indent="0" marL="0">
+              <a:buNone/>
+            </a:pPr>
+            <a:r>
+              <a:rPr lang="en-US" sz="3200" b="1" dirty="0">
+                <a:solidFill>
+                  <a:srgbClr val="00A896"/>
+                </a:solidFill>
+                <a:latin typeface="Cambria" pitchFamily="34" charset="0"/>
+                <a:ea typeface="Cambria" pitchFamily="34" charset="-122"/>
+                <a:cs typeface="Cambria" pitchFamily="34" charset="-120"/>
+              </a:rPr>
+              <a:t>23:00 → 19:00</a:t>
+            </a:r>
+            <a:endParaRPr lang="en-US" sz="3200" dirty="0"/>
+          </a:p>
+        </p:txBody>
+      </p:sp>
+      <p:sp>
+        <p:nvSpPr>
+          <p:cNvPr id="9" name="Text 7"/>
+          <p:cNvSpPr txBox="1"/>
+          <p:nvPr/>
+        </p:nvSpPr>
+        <p:spPr>
+          <a:xfrm>
+            <a:off x="960120" y="3703320"/>
+            <a:ext cx="4572000" cy="822960"/>
           </a:xfrm>
           <a:prstGeom prst="rect">
             <a:avLst/>
@@ -5539,15 +5734,11 @@
           <a:bodyPr wrap="square" lIns="0" tIns="0" rIns="0" bIns="0" rtlCol="0" anchor="t"/>
           <a:lstStyle/>
           <a:p>
-            <a:pPr marL="342900" indent="-342900">
-              <a:spcAft>
-                <a:spcPts val="1000"/>
-              </a:spcAft>
-              <a:buSzPct val="100000"/>
-              <a:buChar char="■"/>
-            </a:pPr>
-            <a:r>
-              <a:rPr lang="en-US" sz="1500" dirty="0">
+            <a:pPr indent="0" marL="0">
+              <a:buNone/>
+            </a:pPr>
+            <a:r>
+              <a:rPr lang="en-US" sz="1400" dirty="0">
                 <a:solidFill>
                   <a:srgbClr val="1F2933"/>
                 </a:solidFill>
@@ -5555,32 +5746,54 @@
                 <a:ea typeface="Calibri" pitchFamily="34" charset="-122"/>
                 <a:cs typeface="Calibri" pitchFamily="34" charset="-120"/>
               </a:rPr>
-              <a:t>同じ確認を、何度でも一瞬で</a:t>
-            </a:r>
-            <a:endParaRPr lang="en-US" sz="1500" dirty="0"/>
-          </a:p>
+              <a:t>リリース前の回帰確認にかかっていた時間。定時で帰れる日が増えた</a:t>
+            </a:r>
+            <a:endParaRPr lang="en-US" sz="1400" dirty="0"/>
+          </a:p>
+        </p:txBody>
+      </p:sp>
+      <p:sp>
+        <p:nvSpPr>
+          <p:cNvPr id="10" name="Text 8"/>
+          <p:cNvSpPr txBox="1"/>
+          <p:nvPr/>
+        </p:nvSpPr>
+        <p:spPr>
+          <a:xfrm>
+            <a:off x="960120" y="4663440"/>
+            <a:ext cx="4572000" cy="457200"/>
+          </a:xfrm>
+          <a:prstGeom prst="rect">
+            <a:avLst/>
+          </a:prstGeom>
+          <a:noFill/>
+          <a:ln/>
+        </p:spPr>
+        <p:txBody>
+          <a:bodyPr wrap="square" lIns="0" tIns="0" rIns="0" bIns="0" rtlCol="0" anchor="ctr"/>
+          <a:lstStyle/>
           <a:p>
             <a:pPr indent="0" marL="0">
               <a:buNone/>
             </a:pPr>
             <a:r>
-              <a:rPr lang="en-US" sz="1500" dirty="0">
-                <a:solidFill>
-                  <a:srgbClr val="1F2933"/>
-                </a:solidFill>
-                <a:latin typeface="Calibri" pitchFamily="34" charset="0"/>
-                <a:ea typeface="Calibri" pitchFamily="34" charset="-122"/>
-                <a:cs typeface="Calibri" pitchFamily="34" charset="-120"/>
-              </a:rPr>
-              <a:t>新機能を追加するときの安心感</a:t>
-            </a:r>
-            <a:endParaRPr lang="en-US" sz="1500" dirty="0"/>
-          </a:p>
-        </p:txBody>
-      </p:sp>
-      <p:sp>
-        <p:nvSpPr>
-          <p:cNvPr id="9" name="Shape 7"/>
+              <a:rPr lang="en-US" sz="1300" dirty="0">
+                <a:solidFill>
+                  <a:srgbClr val="3E6B63"/>
+                </a:solidFill>
+                <a:latin typeface="Calibri" pitchFamily="34" charset="0"/>
+                <a:ea typeface="Calibri" pitchFamily="34" charset="-122"/>
+                <a:cs typeface="Calibri" pitchFamily="34" charset="-120"/>
+              </a:rPr>
+              <a:t>新機能を追加するときの安心感も</a:t>
+            </a:r>
+            <a:endParaRPr lang="en-US" sz="1300" dirty="0"/>
+          </a:p>
+        </p:txBody>
+      </p:sp>
+      <p:sp>
+        <p:nvSpPr>
+          <p:cNvPr id="11" name="Shape 9"/>
           <p:cNvSpPr/>
           <p:nvPr/>
         </p:nvSpPr>
@@ -5609,7 +5822,7 @@
       </p:sp>
       <p:sp>
         <p:nvSpPr>
-          <p:cNvPr id="10" name="Shape 8"/>
+          <p:cNvPr id="12" name="Shape 10"/>
           <p:cNvSpPr/>
           <p:nvPr/>
         </p:nvSpPr>
@@ -5629,7 +5842,7 @@
       </p:sp>
       <p:sp>
         <p:nvSpPr>
-          <p:cNvPr id="11" name="Text 9"/>
+          <p:cNvPr id="13" name="Text 11"/>
           <p:cNvSpPr txBox="1"/>
           <p:nvPr/>
         </p:nvSpPr>
@@ -5668,7 +5881,7 @@
       </p:sp>
       <p:sp>
         <p:nvSpPr>
-          <p:cNvPr id="12" name="Text 10"/>
+          <p:cNvPr id="14" name="Text 12"/>
           <p:cNvSpPr txBox="1"/>
           <p:nvPr/>
         </p:nvSpPr>
@@ -5707,7 +5920,7 @@
       </p:sp>
       <p:sp>
         <p:nvSpPr>
-          <p:cNvPr id="13" name="Text 11"/>
+          <p:cNvPr id="15" name="Text 13"/>
           <p:cNvSpPr txBox="1"/>
           <p:nvPr/>
         </p:nvSpPr>
@@ -5742,7 +5955,7 @@
                 <a:ea typeface="Calibri" pitchFamily="34" charset="-122"/>
                 <a:cs typeface="Calibri" pitchFamily="34" charset="-120"/>
               </a:rPr>
-              <a:t>安定させるのに、地味に工夫がいる</a:t>
+              <a:t>状態依存のUIはセレクタが安定しにくい</a:t>
             </a:r>
             <a:endParaRPr lang="en-US" sz="1500" dirty="0"/>
           </a:p>
@@ -5767,7 +5980,7 @@
       </p:sp>
       <p:sp>
         <p:nvSpPr>
-          <p:cNvPr id="15" name="Text 12"/>
+          <p:cNvPr id="17" name="Text 14"/>
           <p:cNvSpPr txBox="1"/>
           <p:nvPr/>
         </p:nvSpPr>

--- a/materials/初心者向けLT-E2Eテスト自動化/slides.pptx
+++ b/materials/初心者向けLT-E2Eテスト自動化/slides.pptx
@@ -598,7 +598,7 @@
           <a:p>
             <a:r>
               <a:rPr lang="en-US" dirty="0"/>
-              <a:t>[0:20-0:50] 導入。SIerで手動テスト・目視確認が当たり前だったことを話す。</a:t>
+              <a:t>[0:20-0:50] 導入。フォーム入力や3ロール承認フローなどを、テストコード無しでPostmanを都度叩いて確認していた話。</a:t>
             </a:r>
             <a:endParaRPr lang="en-US" dirty="0"/>
           </a:p>
@@ -686,7 +686,7 @@
           <a:p>
             <a:r>
               <a:rPr lang="en-US" dirty="0"/>
-              <a:t>[0:50-1:30] きっかけ。友達のSaaS開発ではTDDが当たり前だと知って衝撃を受けた話。</a:t>
+              <a:t>[0:50-1:30] きっかけ。友達に『ユニットテストは当たり前やで、実装とセットで書くで』と言われて衝撃を受けた話。</a:t>
             </a:r>
             <a:endParaRPr lang="en-US" dirty="0"/>
           </a:p>
@@ -2254,7 +2254,7 @@
                 <a:ea typeface="Calibri" pitchFamily="34" charset="-122"/>
                 <a:cs typeface="Calibri" pitchFamily="34" charset="-120"/>
               </a:rPr>
-              <a:t>テストは基本、手動・目視確認</a:t>
+              <a:t>申請フロー(3ロールの承認・否認・取り消し)などを確認</a:t>
             </a:r>
             <a:endParaRPr lang="en-US" sz="1600" dirty="0"/>
           </a:p>
@@ -2275,7 +2275,7 @@
                 <a:ea typeface="Calibri" pitchFamily="34" charset="-122"/>
                 <a:cs typeface="Calibri" pitchFamily="34" charset="-120"/>
               </a:rPr>
-              <a:t>画面をポチポチ操作して、目でチェック</a:t>
+              <a:t>テストコードは無し。Postmanで都度APIを叩いて確認</a:t>
             </a:r>
             <a:endParaRPr lang="en-US" sz="1600" dirty="0"/>
           </a:p>
@@ -2742,7 +2742,7 @@
         <p:spPr>
           <a:xfrm>
             <a:off x="6675120" y="2743200"/>
-            <a:ext cx="4389120" cy="2468880"/>
+            <a:ext cx="4389120" cy="1371600"/>
           </a:xfrm>
           <a:prstGeom prst="rect">
             <a:avLst/>
@@ -2754,15 +2754,14 @@
           <a:bodyPr wrap="square" lIns="0" tIns="0" rIns="0" bIns="0" rtlCol="0" anchor="t"/>
           <a:lstStyle/>
           <a:p>
-            <a:pPr marL="342900" indent="-342900">
+            <a:pPr indent="0" marL="0">
               <a:spcAft>
-                <a:spcPts val="1000"/>
+                <a:spcPts val="800"/>
               </a:spcAft>
-              <a:buSzPct val="100000"/>
-              <a:buChar char="■"/>
-            </a:pPr>
-            <a:r>
-              <a:rPr lang="en-US" sz="1500" dirty="0">
+              <a:buNone/>
+            </a:pPr>
+            <a:r>
+              <a:rPr lang="en-US" sz="1700" b="1" i="1" dirty="0">
                 <a:solidFill>
                   <a:srgbClr val="1F2933"/>
                 </a:solidFill>
@@ -2770,17 +2769,16 @@
                 <a:ea typeface="Calibri" pitchFamily="34" charset="-122"/>
                 <a:cs typeface="Calibri" pitchFamily="34" charset="-120"/>
               </a:rPr>
-              <a:t>テスト = 自動(TDD)が前提</a:t>
-            </a:r>
-            <a:endParaRPr lang="en-US" sz="1500" dirty="0"/>
-          </a:p>
-          <a:p>
-            <a:pPr marL="342900" indent="-342900">
-              <a:buSzPct val="100000"/>
-              <a:buChar char="■"/>
-            </a:pPr>
-            <a:r>
-              <a:rPr lang="en-US" sz="1500" dirty="0">
+              <a:t>「ユニットテストは当たり前やで」</a:t>
+            </a:r>
+            <a:endParaRPr lang="en-US" sz="1700" dirty="0"/>
+          </a:p>
+          <a:p>
+            <a:pPr indent="0" marL="0">
+              <a:buNone/>
+            </a:pPr>
+            <a:r>
+              <a:rPr lang="en-US" sz="1700" b="1" i="1" dirty="0">
                 <a:solidFill>
                   <a:srgbClr val="1F2933"/>
                 </a:solidFill>
@@ -2788,15 +2786,54 @@
                 <a:ea typeface="Calibri" pitchFamily="34" charset="-122"/>
                 <a:cs typeface="Calibri" pitchFamily="34" charset="-120"/>
               </a:rPr>
-              <a:t>コードを書く → 即テスト、が当たり前</a:t>
-            </a:r>
-            <a:endParaRPr lang="en-US" sz="1500" dirty="0"/>
+              <a:t>「実装とセットでユニットテスト書くで」</a:t>
+            </a:r>
+            <a:endParaRPr lang="en-US" sz="1700" dirty="0"/>
           </a:p>
         </p:txBody>
       </p:sp>
       <p:sp>
         <p:nvSpPr>
           <p:cNvPr id="10" name="Text 8"/>
+          <p:cNvSpPr txBox="1"/>
+          <p:nvPr/>
+        </p:nvSpPr>
+        <p:spPr>
+          <a:xfrm>
+            <a:off x="6675120" y="4114800"/>
+            <a:ext cx="4389120" cy="365760"/>
+          </a:xfrm>
+          <a:prstGeom prst="rect">
+            <a:avLst/>
+          </a:prstGeom>
+          <a:noFill/>
+          <a:ln/>
+        </p:spPr>
+        <p:txBody>
+          <a:bodyPr wrap="square" lIns="0" tIns="0" rIns="0" bIns="0" rtlCol="0" anchor="ctr"/>
+          <a:lstStyle/>
+          <a:p>
+            <a:pPr indent="0" marL="0">
+              <a:buNone/>
+            </a:pPr>
+            <a:r>
+              <a:rPr lang="en-US" sz="1200" dirty="0">
+                <a:solidFill>
+                  <a:srgbClr val="3E6B63"/>
+                </a:solidFill>
+                <a:latin typeface="Calibri" pitchFamily="34" charset="0"/>
+                <a:ea typeface="Calibri" pitchFamily="34" charset="-122"/>
+                <a:cs typeface="Calibri" pitchFamily="34" charset="-120"/>
+              </a:rPr>
+              <a:t>— 友達(談)</a:t>
+            </a:r>
+            <a:endParaRPr lang="en-US" sz="1200" dirty="0"/>
+          </a:p>
+        </p:txBody>
+      </p:sp>
+      <p:sp>
+        <p:nvSpPr>
+          <p:cNvPr id="11" name="Text 9"/>
           <p:cNvSpPr txBox="1"/>
           <p:nvPr/>
         </p:nvSpPr>
@@ -2835,7 +2872,7 @@
       </p:sp>
       <p:sp>
         <p:nvSpPr>
-          <p:cNvPr id="12" name="Text 9"/>
+          <p:cNvPr id="13" name="Text 10"/>
           <p:cNvSpPr txBox="1"/>
           <p:nvPr/>
         </p:nvSpPr>

--- a/materials/初心者向けLT-E2Eテスト自動化/slides.pptx
+++ b/materials/初心者向けLT-E2Eテスト自動化/slides.pptx
@@ -862,7 +862,7 @@
           <a:p>
             <a:r>
               <a:rPr lang="en-US" dirty="0"/>
-              <a:t>[1:50-2:20] 本題導入。仕事のプロダクトにPlaywrightでE2E自動化を導入した経緯を話す。</a:t>
+              <a:t>[1:50-2:20] 本題導入。自分から提案してPlaywrightでE2E自動化を導入。ちょうど同じ部署の別プロジェクトも動いていて合同で事例共有会をした話。</a:t>
             </a:r>
             <a:endParaRPr lang="en-US" dirty="0"/>
           </a:p>
@@ -3490,8 +3490,8 @@
         </p:nvSpPr>
         <p:spPr>
           <a:xfrm>
-            <a:off x="1005840" y="4297680"/>
-            <a:ext cx="4389120" cy="1005840"/>
+            <a:off x="1005840" y="4251960"/>
+            <a:ext cx="4389120" cy="548640"/>
           </a:xfrm>
           <a:prstGeom prst="rect">
             <a:avLst/>
@@ -3523,7 +3523,46 @@
       </p:sp>
       <p:sp>
         <p:nvSpPr>
-          <p:cNvPr id="12" name="Shape 10"/>
+          <p:cNvPr id="12" name="Text 10"/>
+          <p:cNvSpPr txBox="1"/>
+          <p:nvPr/>
+        </p:nvSpPr>
+        <p:spPr>
+          <a:xfrm>
+            <a:off x="1005840" y="4892040"/>
+            <a:ext cx="4389120" cy="457200"/>
+          </a:xfrm>
+          <a:prstGeom prst="rect">
+            <a:avLst/>
+          </a:prstGeom>
+          <a:noFill/>
+          <a:ln/>
+        </p:spPr>
+        <p:txBody>
+          <a:bodyPr wrap="square" lIns="0" tIns="0" rIns="0" bIns="0" rtlCol="0" anchor="t"/>
+          <a:lstStyle/>
+          <a:p>
+            <a:pPr indent="0" marL="0">
+              <a:buNone/>
+            </a:pPr>
+            <a:r>
+              <a:rPr lang="en-US" sz="1100" i="1" dirty="0">
+                <a:solidFill>
+                  <a:srgbClr val="8AA3A5"/>
+                </a:solidFill>
+                <a:latin typeface="Calibri" pitchFamily="34" charset="0"/>
+                <a:ea typeface="Calibri" pitchFamily="34" charset="-122"/>
+                <a:cs typeface="Calibri" pitchFamily="34" charset="-120"/>
+              </a:rPr>
+              <a:t>(Seleniumはやや古い印象、Cypressは当時知らなかった)</a:t>
+            </a:r>
+            <a:endParaRPr lang="en-US" sz="1100" dirty="0"/>
+          </a:p>
+        </p:txBody>
+      </p:sp>
+      <p:sp>
+        <p:nvSpPr>
+          <p:cNvPr id="13" name="Shape 11"/>
           <p:cNvSpPr/>
           <p:nvPr/>
         </p:nvSpPr>
@@ -3552,7 +3591,7 @@
       </p:sp>
       <p:sp>
         <p:nvSpPr>
-          <p:cNvPr id="13" name="Text 11"/>
+          <p:cNvPr id="14" name="Text 12"/>
           <p:cNvSpPr txBox="1"/>
           <p:nvPr/>
         </p:nvSpPr>
@@ -3591,7 +3630,7 @@
       </p:sp>
       <p:sp>
         <p:nvSpPr>
-          <p:cNvPr id="14" name="Text 12"/>
+          <p:cNvPr id="15" name="Text 13"/>
           <p:cNvSpPr txBox="1"/>
           <p:nvPr/>
         </p:nvSpPr>
@@ -3630,7 +3669,7 @@
       </p:sp>
       <p:sp>
         <p:nvSpPr>
-          <p:cNvPr id="15" name="Text 13"/>
+          <p:cNvPr id="16" name="Text 14"/>
           <p:cNvSpPr txBox="1"/>
           <p:nvPr/>
         </p:nvSpPr>
@@ -3669,7 +3708,46 @@
       </p:sp>
       <p:sp>
         <p:nvSpPr>
-          <p:cNvPr id="17" name="Text 14"/>
+          <p:cNvPr id="17" name="Text 15"/>
+          <p:cNvSpPr txBox="1"/>
+          <p:nvPr/>
+        </p:nvSpPr>
+        <p:spPr>
+          <a:xfrm>
+            <a:off x="640080" y="5806440"/>
+            <a:ext cx="10789920" cy="548640"/>
+          </a:xfrm>
+          <a:prstGeom prst="rect">
+            <a:avLst/>
+          </a:prstGeom>
+          <a:noFill/>
+          <a:ln/>
+        </p:spPr>
+        <p:txBody>
+          <a:bodyPr wrap="square" lIns="0" tIns="0" rIns="0" bIns="0" rtlCol="0" anchor="ctr"/>
+          <a:lstStyle/>
+          <a:p>
+            <a:pPr algn="ctr" indent="0" marL="0">
+              <a:buNone/>
+            </a:pPr>
+            <a:r>
+              <a:rPr lang="en-US" sz="1300" i="1" dirty="0">
+                <a:solidFill>
+                  <a:srgbClr val="028090"/>
+                </a:solidFill>
+                <a:latin typeface="Calibri" pitchFamily="34" charset="0"/>
+                <a:ea typeface="Calibri" pitchFamily="34" charset="-122"/>
+                <a:cs typeface="Calibri" pitchFamily="34" charset="-120"/>
+              </a:rPr>
+              <a:t>自分から提案 → ちょうど同じ部署の別プロジェクトも自動化に動いていて、合同で事例共有会を実施</a:t>
+            </a:r>
+            <a:endParaRPr lang="en-US" sz="1300" dirty="0"/>
+          </a:p>
+        </p:txBody>
+      </p:sp>
+      <p:sp>
+        <p:nvSpPr>
+          <p:cNvPr id="19" name="Text 16"/>
           <p:cNvSpPr txBox="1"/>
           <p:nvPr/>
         </p:nvSpPr>

--- a/materials/初心者向けLT-E2Eテスト自動化/slides.pptx
+++ b/materials/初心者向けLT-E2Eテスト自動化/slides.pptx
@@ -1214,7 +1214,7 @@
           <a:p>
             <a:r>
               <a:rPr lang="en-US" dirty="0"/>
-              <a:t>[4:40-5:00] まとめ。初心者へのメッセージで締める。</a:t>
+              <a:t>[4:40-5:00] まとめ。1)AIで最初の一歩のハードルは下がってる 2)開発エンジニアもテスト設計を知っておこう、の2点で締める。</a:t>
             </a:r>
             <a:endParaRPr lang="en-US" dirty="0"/>
           </a:p>
@@ -6172,7 +6172,7 @@
         </p:nvSpPr>
         <p:spPr>
           <a:xfrm>
-            <a:off x="822960" y="1371600"/>
+            <a:off x="822960" y="1280160"/>
             <a:ext cx="7315200" cy="457200"/>
           </a:xfrm>
           <a:prstGeom prst="rect">
@@ -6197,7 +6197,7 @@
                 <a:ea typeface="Calibri" pitchFamily="34" charset="-122"/>
                 <a:cs typeface="Calibri" pitchFamily="34" charset="-120"/>
               </a:rPr>
-              <a:t>初心者のみなさんへ</a:t>
+              <a:t>初心者のみなさんへ、2つだけ</a:t>
             </a:r>
             <a:endParaRPr lang="en-US" sz="1400" dirty="0"/>
           </a:p>
@@ -6211,8 +6211,8 @@
         </p:nvSpPr>
         <p:spPr>
           <a:xfrm>
-            <a:off x="822960" y="1920240"/>
-            <a:ext cx="10058400" cy="2194560"/>
+            <a:off x="822960" y="1783080"/>
+            <a:ext cx="10789920" cy="914400"/>
           </a:xfrm>
           <a:prstGeom prst="rect">
             <a:avLst/>
@@ -6226,42 +6226,39 @@
           <a:p>
             <a:pPr indent="0" marL="0">
               <a:lnSpc>
-                <a:spcPct val="125000"/>
+                <a:spcPct val="115000"/>
               </a:lnSpc>
               <a:buNone/>
             </a:pPr>
             <a:r>
-              <a:rPr lang="en-US" sz="3600" b="1" dirty="0">
-                <a:solidFill>
-                  <a:srgbClr val="FFFFFF"/>
+              <a:rPr lang="en-US" sz="2800" b="1" dirty="0">
+                <a:solidFill>
+                  <a:srgbClr val="6FA9AC"/>
                 </a:solidFill>
                 <a:latin typeface="Cambria" pitchFamily="34" charset="0"/>
                 <a:ea typeface="Cambria" pitchFamily="34" charset="-122"/>
                 <a:cs typeface="Cambria" pitchFamily="34" charset="-120"/>
               </a:rPr>
-              <a:t>自動化は、銀の弾丸じゃない。</a:t>
-            </a:r>
-            <a:endParaRPr lang="en-US" sz="3600" dirty="0"/>
-          </a:p>
-          <a:p>
+              <a:t>1. </a:t>
+            </a:r>
             <a:pPr indent="0" marL="0">
               <a:lnSpc>
-                <a:spcPct val="125000"/>
+                <a:spcPct val="115000"/>
               </a:lnSpc>
               <a:buNone/>
             </a:pPr>
             <a:r>
-              <a:rPr lang="en-US" sz="3600" b="1" dirty="0">
-                <a:solidFill>
-                  <a:srgbClr val="02C39A"/>
+              <a:rPr lang="en-US" sz="2800" b="1" dirty="0">
+                <a:solidFill>
+                  <a:srgbClr val="FFFFFF"/>
                 </a:solidFill>
                 <a:latin typeface="Cambria" pitchFamily="34" charset="0"/>
                 <a:ea typeface="Cambria" pitchFamily="34" charset="-122"/>
                 <a:cs typeface="Cambria" pitchFamily="34" charset="-120"/>
               </a:rPr>
-              <a:t>でも、試す価値はある。</a:t>
-            </a:r>
-            <a:endParaRPr lang="en-US" sz="3600" dirty="0"/>
+              <a:t>AIで、最初の一歩のハードルは下がってる</a:t>
+            </a:r>
+            <a:endParaRPr lang="en-US" sz="2800" dirty="0"/>
           </a:p>
         </p:txBody>
       </p:sp>
@@ -6273,8 +6270,8 @@
         </p:nvSpPr>
         <p:spPr>
           <a:xfrm>
-            <a:off x="822960" y="4206240"/>
-            <a:ext cx="9601200" cy="548640"/>
+            <a:off x="822960" y="2788920"/>
+            <a:ext cx="10789920" cy="1280160"/>
           </a:xfrm>
           <a:prstGeom prst="rect">
             <a:avLst/>
@@ -6287,33 +6284,92 @@
           <a:lstStyle/>
           <a:p>
             <a:pPr indent="0" marL="0">
-              <a:buNone/>
-            </a:pPr>
-            <a:r>
-              <a:rPr lang="en-US" sz="1600" dirty="0">
-                <a:solidFill>
-                  <a:srgbClr val="BFDEDF"/>
-                </a:solidFill>
-                <a:latin typeface="Calibri" pitchFamily="34" charset="0"/>
-                <a:ea typeface="Calibri" pitchFamily="34" charset="-122"/>
-                <a:cs typeface="Calibri" pitchFamily="34" charset="-120"/>
-              </a:rPr>
-              <a:t>うまくいかなくても、小さく試してみるところから。</a:t>
-            </a:r>
-            <a:endParaRPr lang="en-US" sz="1600" dirty="0"/>
-          </a:p>
-        </p:txBody>
-      </p:sp>
-      <p:sp>
-        <p:nvSpPr>
-          <p:cNvPr id="5" name="Shape 3"/>
+              <a:lnSpc>
+                <a:spcPct val="115000"/>
+              </a:lnSpc>
+              <a:buNone/>
+            </a:pPr>
+            <a:r>
+              <a:rPr lang="en-US" sz="2800" b="1" dirty="0">
+                <a:solidFill>
+                  <a:srgbClr val="6FA9AC"/>
+                </a:solidFill>
+                <a:latin typeface="Cambria" pitchFamily="34" charset="0"/>
+                <a:ea typeface="Cambria" pitchFamily="34" charset="-122"/>
+                <a:cs typeface="Cambria" pitchFamily="34" charset="-120"/>
+              </a:rPr>
+              <a:t>2. </a:t>
+            </a:r>
+            <a:pPr indent="0" marL="0">
+              <a:lnSpc>
+                <a:spcPct val="115000"/>
+              </a:lnSpc>
+              <a:buNone/>
+            </a:pPr>
+            <a:r>
+              <a:rPr lang="en-US" sz="2800" b="1" dirty="0">
+                <a:solidFill>
+                  <a:srgbClr val="02C39A"/>
+                </a:solidFill>
+                <a:latin typeface="Cambria" pitchFamily="34" charset="0"/>
+                <a:ea typeface="Cambria" pitchFamily="34" charset="-122"/>
+                <a:cs typeface="Cambria" pitchFamily="34" charset="-120"/>
+              </a:rPr>
+              <a:t>開発エンジニアも、テスト設計をなんとなく知っておこう</a:t>
+            </a:r>
+            <a:endParaRPr lang="en-US" sz="2800" dirty="0"/>
+          </a:p>
+        </p:txBody>
+      </p:sp>
+      <p:sp>
+        <p:nvSpPr>
+          <p:cNvPr id="5" name="Text 3"/>
+          <p:cNvSpPr txBox="1"/>
+          <p:nvPr/>
+        </p:nvSpPr>
+        <p:spPr>
+          <a:xfrm>
+            <a:off x="822960" y="4343400"/>
+            <a:ext cx="9601200" cy="457200"/>
+          </a:xfrm>
+          <a:prstGeom prst="rect">
+            <a:avLst/>
+          </a:prstGeom>
+          <a:noFill/>
+          <a:ln/>
+        </p:spPr>
+        <p:txBody>
+          <a:bodyPr wrap="square" lIns="0" tIns="0" rIns="0" bIns="0" rtlCol="0" anchor="ctr"/>
+          <a:lstStyle/>
+          <a:p>
+            <a:pPr indent="0" marL="0">
+              <a:buNone/>
+            </a:pPr>
+            <a:r>
+              <a:rPr lang="en-US" sz="1300" i="1" dirty="0">
+                <a:solidFill>
+                  <a:srgbClr val="8AA3A5"/>
+                </a:solidFill>
+                <a:latin typeface="Calibri" pitchFamily="34" charset="0"/>
+                <a:ea typeface="Calibri" pitchFamily="34" charset="-122"/>
+                <a:cs typeface="Calibri" pitchFamily="34" charset="-120"/>
+              </a:rPr>
+              <a:t>(ちなみに僕は、PlaywrightのGUI使えばよかったなと今は思ってます)</a:t>
+            </a:r>
+            <a:endParaRPr lang="en-US" sz="1300" dirty="0"/>
+          </a:p>
+        </p:txBody>
+      </p:sp>
+      <p:sp>
+        <p:nvSpPr>
+          <p:cNvPr id="6" name="Shape 4"/>
           <p:cNvSpPr/>
           <p:nvPr/>
         </p:nvSpPr>
         <p:spPr>
           <a:xfrm>
-            <a:off x="9418320" y="5029200"/>
-            <a:ext cx="502920" cy="502920"/>
+            <a:off x="9418320" y="5120640"/>
+            <a:ext cx="457200" cy="457200"/>
           </a:xfrm>
           <a:prstGeom prst="ellipse">
             <a:avLst/>
@@ -6326,14 +6382,14 @@
       </p:sp>
       <p:sp>
         <p:nvSpPr>
-          <p:cNvPr id="6" name="Text 4"/>
-          <p:cNvSpPr txBox="1"/>
-          <p:nvPr/>
-        </p:nvSpPr>
-        <p:spPr>
-          <a:xfrm>
-            <a:off x="9418320" y="5029200"/>
-            <a:ext cx="502920" cy="502920"/>
+          <p:cNvPr id="7" name="Text 5"/>
+          <p:cNvSpPr txBox="1"/>
+          <p:nvPr/>
+        </p:nvSpPr>
+        <p:spPr>
+          <a:xfrm>
+            <a:off x="9418320" y="5120640"/>
+            <a:ext cx="457200" cy="457200"/>
           </a:xfrm>
           <a:prstGeom prst="rect">
             <a:avLst/>
@@ -6349,7 +6405,7 @@
               <a:buNone/>
             </a:pPr>
             <a:r>
-              <a:rPr lang="en-US" sz="1900" b="1" dirty="0">
+              <a:rPr lang="en-US" sz="1700" b="1" dirty="0">
                 <a:solidFill>
                   <a:srgbClr val="FFFFFF"/>
                 </a:solidFill>
@@ -6359,20 +6415,20 @@
               </a:rPr>
               <a:t>✗</a:t>
             </a:r>
-            <a:endParaRPr lang="en-US" sz="1900" dirty="0"/>
-          </a:p>
-        </p:txBody>
-      </p:sp>
-      <p:sp>
-        <p:nvSpPr>
-          <p:cNvPr id="7" name="Shape 5"/>
+            <a:endParaRPr lang="en-US" sz="1700" dirty="0"/>
+          </a:p>
+        </p:txBody>
+      </p:sp>
+      <p:sp>
+        <p:nvSpPr>
+          <p:cNvPr id="8" name="Shape 6"/>
           <p:cNvSpPr/>
           <p:nvPr/>
         </p:nvSpPr>
         <p:spPr>
           <a:xfrm>
-            <a:off x="10076688" y="5029200"/>
-            <a:ext cx="502920" cy="502920"/>
+            <a:off x="10076688" y="5120640"/>
+            <a:ext cx="457200" cy="457200"/>
           </a:xfrm>
           <a:prstGeom prst="ellipse">
             <a:avLst/>
@@ -6385,14 +6441,14 @@
       </p:sp>
       <p:sp>
         <p:nvSpPr>
-          <p:cNvPr id="8" name="Text 6"/>
-          <p:cNvSpPr txBox="1"/>
-          <p:nvPr/>
-        </p:nvSpPr>
-        <p:spPr>
-          <a:xfrm>
-            <a:off x="10076688" y="5029200"/>
-            <a:ext cx="502920" cy="502920"/>
+          <p:cNvPr id="9" name="Text 7"/>
+          <p:cNvSpPr txBox="1"/>
+          <p:nvPr/>
+        </p:nvSpPr>
+        <p:spPr>
+          <a:xfrm>
+            <a:off x="10076688" y="5120640"/>
+            <a:ext cx="457200" cy="457200"/>
           </a:xfrm>
           <a:prstGeom prst="rect">
             <a:avLst/>
@@ -6408,7 +6464,7 @@
               <a:buNone/>
             </a:pPr>
             <a:r>
-              <a:rPr lang="en-US" sz="1900" b="1" dirty="0">
+              <a:rPr lang="en-US" sz="1700" b="1" dirty="0">
                 <a:solidFill>
                   <a:srgbClr val="FFFFFF"/>
                 </a:solidFill>
@@ -6418,20 +6474,20 @@
               </a:rPr>
               <a:t>✓</a:t>
             </a:r>
-            <a:endParaRPr lang="en-US" sz="1900" dirty="0"/>
-          </a:p>
-        </p:txBody>
-      </p:sp>
-      <p:sp>
-        <p:nvSpPr>
-          <p:cNvPr id="9" name="Shape 7"/>
+            <a:endParaRPr lang="en-US" sz="1700" dirty="0"/>
+          </a:p>
+        </p:txBody>
+      </p:sp>
+      <p:sp>
+        <p:nvSpPr>
+          <p:cNvPr id="10" name="Shape 8"/>
           <p:cNvSpPr/>
           <p:nvPr/>
         </p:nvSpPr>
         <p:spPr>
           <a:xfrm>
-            <a:off x="10735056" y="5029200"/>
-            <a:ext cx="502920" cy="502920"/>
+            <a:off x="10735056" y="5120640"/>
+            <a:ext cx="457200" cy="457200"/>
           </a:xfrm>
           <a:prstGeom prst="ellipse">
             <a:avLst/>
@@ -6444,14 +6500,14 @@
       </p:sp>
       <p:sp>
         <p:nvSpPr>
-          <p:cNvPr id="10" name="Text 8"/>
-          <p:cNvSpPr txBox="1"/>
-          <p:nvPr/>
-        </p:nvSpPr>
-        <p:spPr>
-          <a:xfrm>
-            <a:off x="10735056" y="5029200"/>
-            <a:ext cx="502920" cy="502920"/>
+          <p:cNvPr id="11" name="Text 9"/>
+          <p:cNvSpPr txBox="1"/>
+          <p:nvPr/>
+        </p:nvSpPr>
+        <p:spPr>
+          <a:xfrm>
+            <a:off x="10735056" y="5120640"/>
+            <a:ext cx="457200" cy="457200"/>
           </a:xfrm>
           <a:prstGeom prst="rect">
             <a:avLst/>
@@ -6467,7 +6523,7 @@
               <a:buNone/>
             </a:pPr>
             <a:r>
-              <a:rPr lang="en-US" sz="1900" b="1" dirty="0">
+              <a:rPr lang="en-US" sz="1700" b="1" dirty="0">
                 <a:solidFill>
                   <a:srgbClr val="FFFFFF"/>
                 </a:solidFill>
@@ -6477,20 +6533,20 @@
               </a:rPr>
               <a:t>✗</a:t>
             </a:r>
-            <a:endParaRPr lang="en-US" sz="1900" dirty="0"/>
-          </a:p>
-        </p:txBody>
-      </p:sp>
-      <p:sp>
-        <p:nvSpPr>
-          <p:cNvPr id="11" name="Shape 9"/>
+            <a:endParaRPr lang="en-US" sz="1700" dirty="0"/>
+          </a:p>
+        </p:txBody>
+      </p:sp>
+      <p:sp>
+        <p:nvSpPr>
+          <p:cNvPr id="12" name="Shape 10"/>
           <p:cNvSpPr/>
           <p:nvPr/>
         </p:nvSpPr>
         <p:spPr>
           <a:xfrm>
-            <a:off x="11393424" y="5029200"/>
-            <a:ext cx="502920" cy="502920"/>
+            <a:off x="11393424" y="5120640"/>
+            <a:ext cx="457200" cy="457200"/>
           </a:xfrm>
           <a:prstGeom prst="ellipse">
             <a:avLst/>
@@ -6503,14 +6559,14 @@
       </p:sp>
       <p:sp>
         <p:nvSpPr>
-          <p:cNvPr id="12" name="Text 10"/>
-          <p:cNvSpPr txBox="1"/>
-          <p:nvPr/>
-        </p:nvSpPr>
-        <p:spPr>
-          <a:xfrm>
-            <a:off x="11393424" y="5029200"/>
-            <a:ext cx="502920" cy="502920"/>
+          <p:cNvPr id="13" name="Text 11"/>
+          <p:cNvSpPr txBox="1"/>
+          <p:nvPr/>
+        </p:nvSpPr>
+        <p:spPr>
+          <a:xfrm>
+            <a:off x="11393424" y="5120640"/>
+            <a:ext cx="457200" cy="457200"/>
           </a:xfrm>
           <a:prstGeom prst="rect">
             <a:avLst/>
@@ -6526,7 +6582,7 @@
               <a:buNone/>
             </a:pPr>
             <a:r>
-              <a:rPr lang="en-US" sz="1900" b="1" dirty="0">
+              <a:rPr lang="en-US" sz="1700" b="1" dirty="0">
                 <a:solidFill>
                   <a:srgbClr val="FFFFFF"/>
                 </a:solidFill>
@@ -6536,19 +6592,19 @@
               </a:rPr>
               <a:t>✓</a:t>
             </a:r>
-            <a:endParaRPr lang="en-US" sz="1900" dirty="0"/>
-          </a:p>
-        </p:txBody>
-      </p:sp>
-      <p:sp>
-        <p:nvSpPr>
-          <p:cNvPr id="13" name="Text 11"/>
-          <p:cNvSpPr txBox="1"/>
-          <p:nvPr/>
-        </p:nvSpPr>
-        <p:spPr>
-          <a:xfrm>
-            <a:off x="822960" y="5943600"/>
+            <a:endParaRPr lang="en-US" sz="1700" dirty="0"/>
+          </a:p>
+        </p:txBody>
+      </p:sp>
+      <p:sp>
+        <p:nvSpPr>
+          <p:cNvPr id="14" name="Text 12"/>
+          <p:cNvSpPr txBox="1"/>
+          <p:nvPr/>
+        </p:nvSpPr>
+        <p:spPr>
+          <a:xfrm>
+            <a:off x="822960" y="6035040"/>
             <a:ext cx="7315200" cy="457200"/>
           </a:xfrm>
           <a:prstGeom prst="rect">
@@ -6581,7 +6637,7 @@
       </p:sp>
       <p:sp>
         <p:nvSpPr>
-          <p:cNvPr id="15" name="Text 12"/>
+          <p:cNvPr id="16" name="Text 13"/>
           <p:cNvSpPr txBox="1"/>
           <p:nvPr/>
         </p:nvSpPr>
